--- a/presentation/Project2-Instrumented-Monitored-Service.pptx
+++ b/presentation/Project2-Instrumented-Monitored-Service.pptx
@@ -243,7 +243,7 @@
           <a:p>
             <a:fld id="{8CD26A2A-0A96-0647-84E5-C82F2EFD9474}" type="datetimeFigureOut">
               <a:rPr lang="en-US" smtClean="0"/>
-              <a:t>8/16/2026</a:t>
+              <a:t>8/17/2026</a:t>
             </a:fld>
             <a:endParaRPr lang="en-US" dirty="0"/>
           </a:p>
@@ -508,7 +508,7 @@
           <a:p>
             <a:fld id="{5B0CF20C-6BCC-41A4-8C16-5A346425718D}" type="datetimeFigureOut">
               <a:rPr lang="en-US" smtClean="0"/>
-              <a:t>8/16/2026</a:t>
+              <a:t>8/17/2026</a:t>
             </a:fld>
             <a:endParaRPr lang="en-US" dirty="0"/>
           </a:p>
@@ -12558,13 +12558,25 @@
           <a:p>
             <a:r>
               <a:rPr lang="en-US" dirty="0"/>
+              <a:t>Create logs with sufficient data and identified to track relevant information for troubleshooting. </a:t>
+            </a:r>
+          </a:p>
+          <a:p>
+            <a:r>
+              <a:rPr lang="en-US" dirty="0"/>
               <a:t>Filter log info to monitor the server and create alerts to perform actions immediately.</a:t>
             </a:r>
           </a:p>
           <a:p>
             <a:r>
               <a:rPr lang="en-US" dirty="0"/>
-              <a:t>Functionality of a widget, how it is populated, sample frequency and display type. </a:t>
+              <a:t>Functionality of a widget, how it is populated, sample frequency and display type.</a:t>
+            </a:r>
+          </a:p>
+          <a:p>
+            <a:r>
+              <a:rPr lang="en-US" dirty="0"/>
+              <a:t>Use of RED/USE Methodology to find the root cause. </a:t>
             </a:r>
           </a:p>
         </p:txBody>
@@ -12993,6 +13005,27 @@
               <a:rPr lang="en-US" dirty="0"/>
               <a:t>Redesign logging of cart requests to get proper values for active carts to be displayed in the dashboard.</a:t>
             </a:r>
+          </a:p>
+          <a:p>
+            <a:r>
+              <a:rPr lang="en-US" dirty="0"/>
+              <a:t>Enable duration metric to be filtered in the log insights. </a:t>
+            </a:r>
+          </a:p>
+          <a:p>
+            <a:r>
+              <a:rPr lang="en-US" dirty="0"/>
+              <a:t>Increase the number of business metrics and eventually create a dashboard for business metrics</a:t>
+            </a:r>
+          </a:p>
+          <a:p>
+            <a:r>
+              <a:rPr lang="en-US" dirty="0"/>
+              <a:t>Add cart storage using DynamoDB or another datastore.</a:t>
+            </a:r>
+          </a:p>
+          <a:p>
+            <a:endParaRPr lang="en-US" dirty="0"/>
           </a:p>
         </p:txBody>
       </p:sp>
@@ -13895,13 +13928,13 @@
             <p:ph idx="1"/>
             <p:extLst>
               <p:ext uri="{D42A27DB-BD31-4B8C-83A1-F6EECF244321}">
-                <p14:modId xmlns:p14="http://schemas.microsoft.com/office/powerpoint/2010/main" val="1768116451"/>
+                <p14:modId xmlns:p14="http://schemas.microsoft.com/office/powerpoint/2010/main" val="2015624927"/>
               </p:ext>
             </p:extLst>
           </p:nvPr>
         </p:nvGraphicFramePr>
         <p:xfrm>
-          <a:off x="5655354" y="2342859"/>
+          <a:off x="5571923" y="2244598"/>
           <a:ext cx="5622246" cy="1854200"/>
         </p:xfrm>
         <a:graphic>
@@ -14334,36 +14367,215 @@
           </a:prstGeom>
         </p:spPr>
       </p:pic>
-      <p:pic>
-        <p:nvPicPr>
-          <p:cNvPr id="14" name="Picture 13">
+      <p:graphicFrame>
+        <p:nvGraphicFramePr>
+          <p:cNvPr id="3" name="Content Placeholder 7">
             <a:extLst>
               <a:ext uri="{FF2B5EF4-FFF2-40B4-BE49-F238E27FC236}">
-                <a16:creationId xmlns:a16="http://schemas.microsoft.com/office/drawing/2014/main" id="{A721040C-5457-D0E6-C77D-CDE359BA0110}"/>
+                <a16:creationId xmlns:a16="http://schemas.microsoft.com/office/drawing/2014/main" id="{C4D0491A-8F76-9186-397D-3F48099BB3E1}"/>
               </a:ext>
             </a:extLst>
           </p:cNvPr>
-          <p:cNvPicPr>
-            <a:picLocks noChangeAspect="1"/>
-          </p:cNvPicPr>
-          <p:nvPr/>
-        </p:nvPicPr>
-        <p:blipFill>
-          <a:blip r:embed="rId3"/>
-          <a:stretch>
-            <a:fillRect/>
-          </a:stretch>
-        </p:blipFill>
-        <p:spPr>
-          <a:xfrm>
-            <a:off x="5352148" y="4947216"/>
-            <a:ext cx="6071317" cy="988546"/>
-          </a:xfrm>
-          <a:prstGeom prst="rect">
-            <a:avLst/>
-          </a:prstGeom>
-        </p:spPr>
-      </p:pic>
+          <p:cNvGraphicFramePr>
+            <a:graphicFrameLocks/>
+          </p:cNvGraphicFramePr>
+          <p:nvPr>
+            <p:extLst>
+              <p:ext uri="{D42A27DB-BD31-4B8C-83A1-F6EECF244321}">
+                <p14:modId xmlns:p14="http://schemas.microsoft.com/office/powerpoint/2010/main" val="3149984056"/>
+              </p:ext>
+            </p:extLst>
+          </p:nvPr>
+        </p:nvGraphicFramePr>
+        <p:xfrm>
+          <a:off x="5571923" y="4363720"/>
+          <a:ext cx="5622246" cy="1854200"/>
+        </p:xfrm>
+        <a:graphic>
+          <a:graphicData uri="http://schemas.openxmlformats.org/drawingml/2006/table">
+            <a:tbl>
+              <a:tblPr firstRow="1" bandRow="1">
+                <a:tableStyleId>{9DCAF9ED-07DC-4A11-8D7F-57B35C25682E}</a:tableStyleId>
+              </a:tblPr>
+              <a:tblGrid>
+                <a:gridCol w="2811123">
+                  <a:extLst>
+                    <a:ext uri="{9D8B030D-6E8A-4147-A177-3AD203B41FA5}">
+                      <a16:colId xmlns:a16="http://schemas.microsoft.com/office/drawing/2014/main" val="1392984329"/>
+                    </a:ext>
+                  </a:extLst>
+                </a:gridCol>
+                <a:gridCol w="2811123">
+                  <a:extLst>
+                    <a:ext uri="{9D8B030D-6E8A-4147-A177-3AD203B41FA5}">
+                      <a16:colId xmlns:a16="http://schemas.microsoft.com/office/drawing/2014/main" val="3174544343"/>
+                    </a:ext>
+                  </a:extLst>
+                </a:gridCol>
+              </a:tblGrid>
+              <a:tr h="370840">
+                <a:tc>
+                  <a:txBody>
+                    <a:bodyPr/>
+                    <a:lstStyle/>
+                    <a:p>
+                      <a:r>
+                        <a:rPr lang="en-US" dirty="0"/>
+                        <a:t>EC2 Metrics</a:t>
+                      </a:r>
+                    </a:p>
+                  </a:txBody>
+                  <a:tcPr/>
+                </a:tc>
+                <a:tc>
+                  <a:txBody>
+                    <a:bodyPr/>
+                    <a:lstStyle/>
+                    <a:p>
+                      <a:r>
+                        <a:rPr lang="en-US" dirty="0"/>
+                        <a:t>ALB Metrics</a:t>
+                      </a:r>
+                    </a:p>
+                  </a:txBody>
+                  <a:tcPr/>
+                </a:tc>
+                <a:extLst>
+                  <a:ext uri="{0D108BD9-81ED-4DB2-BD59-A6C34878D82A}">
+                    <a16:rowId xmlns:a16="http://schemas.microsoft.com/office/drawing/2014/main" val="1212776995"/>
+                  </a:ext>
+                </a:extLst>
+              </a:tr>
+              <a:tr h="370840">
+                <a:tc>
+                  <a:txBody>
+                    <a:bodyPr/>
+                    <a:lstStyle/>
+                    <a:p>
+                      <a:r>
+                        <a:rPr lang="en-US" dirty="0"/>
+                        <a:t>CPU Usage</a:t>
+                      </a:r>
+                    </a:p>
+                  </a:txBody>
+                  <a:tcPr/>
+                </a:tc>
+                <a:tc>
+                  <a:txBody>
+                    <a:bodyPr/>
+                    <a:lstStyle/>
+                    <a:p>
+                      <a:r>
+                        <a:rPr lang="en-US" dirty="0"/>
+                        <a:t>Target Response Time</a:t>
+                      </a:r>
+                    </a:p>
+                  </a:txBody>
+                  <a:tcPr/>
+                </a:tc>
+                <a:extLst>
+                  <a:ext uri="{0D108BD9-81ED-4DB2-BD59-A6C34878D82A}">
+                    <a16:rowId xmlns:a16="http://schemas.microsoft.com/office/drawing/2014/main" val="766957142"/>
+                  </a:ext>
+                </a:extLst>
+              </a:tr>
+              <a:tr h="370840">
+                <a:tc>
+                  <a:txBody>
+                    <a:bodyPr/>
+                    <a:lstStyle/>
+                    <a:p>
+                      <a:r>
+                        <a:rPr lang="en-US" dirty="0"/>
+                        <a:t>Network In/Out</a:t>
+                      </a:r>
+                    </a:p>
+                  </a:txBody>
+                  <a:tcPr/>
+                </a:tc>
+                <a:tc>
+                  <a:txBody>
+                    <a:bodyPr/>
+                    <a:lstStyle/>
+                    <a:p>
+                      <a:r>
+                        <a:rPr lang="en-US" dirty="0"/>
+                        <a:t>Request Count</a:t>
+                      </a:r>
+                    </a:p>
+                  </a:txBody>
+                  <a:tcPr/>
+                </a:tc>
+                <a:extLst>
+                  <a:ext uri="{0D108BD9-81ED-4DB2-BD59-A6C34878D82A}">
+                    <a16:rowId xmlns:a16="http://schemas.microsoft.com/office/drawing/2014/main" val="847364056"/>
+                  </a:ext>
+                </a:extLst>
+              </a:tr>
+              <a:tr h="370840">
+                <a:tc>
+                  <a:txBody>
+                    <a:bodyPr/>
+                    <a:lstStyle/>
+                    <a:p>
+                      <a:endParaRPr lang="en-US" dirty="0"/>
+                    </a:p>
+                  </a:txBody>
+                  <a:tcPr/>
+                </a:tc>
+                <a:tc>
+                  <a:txBody>
+                    <a:bodyPr/>
+                    <a:lstStyle/>
+                    <a:p>
+                      <a:r>
+                        <a:rPr lang="en-US" dirty="0"/>
+                        <a:t>Healthy Targets</a:t>
+                      </a:r>
+                    </a:p>
+                  </a:txBody>
+                  <a:tcPr/>
+                </a:tc>
+                <a:extLst>
+                  <a:ext uri="{0D108BD9-81ED-4DB2-BD59-A6C34878D82A}">
+                    <a16:rowId xmlns:a16="http://schemas.microsoft.com/office/drawing/2014/main" val="2562165197"/>
+                  </a:ext>
+                </a:extLst>
+              </a:tr>
+              <a:tr h="370840">
+                <a:tc>
+                  <a:txBody>
+                    <a:bodyPr/>
+                    <a:lstStyle/>
+                    <a:p>
+                      <a:endParaRPr lang="en-US" dirty="0"/>
+                    </a:p>
+                  </a:txBody>
+                  <a:tcPr/>
+                </a:tc>
+                <a:tc>
+                  <a:txBody>
+                    <a:bodyPr/>
+                    <a:lstStyle/>
+                    <a:p>
+                      <a:r>
+                        <a:rPr lang="en-US" dirty="0"/>
+                        <a:t>HTTP Code Responses</a:t>
+                      </a:r>
+                    </a:p>
+                  </a:txBody>
+                  <a:tcPr/>
+                </a:tc>
+                <a:extLst>
+                  <a:ext uri="{0D108BD9-81ED-4DB2-BD59-A6C34878D82A}">
+                    <a16:rowId xmlns:a16="http://schemas.microsoft.com/office/drawing/2014/main" val="1075315847"/>
+                  </a:ext>
+                </a:extLst>
+              </a:tr>
+            </a:tbl>
+          </a:graphicData>
+        </a:graphic>
+      </p:graphicFrame>
     </p:spTree>
     <p:extLst>
       <p:ext uri="{BB962C8B-B14F-4D97-AF65-F5344CB8AC3E}">
@@ -15350,7 +15562,7 @@
             </a:r>
             <a:r>
               <a:rPr lang="en-US" sz="1600" dirty="0"/>
-              <a:t> 2,500 users experienced slow page loads, 35% error rate  </a:t>
+              <a:t> 250 users experienced slow page loads, 35% error rate  </a:t>
             </a:r>
           </a:p>
           <a:p>
@@ -16594,15 +16806,6 @@
 </file>
 
 <file path=customXml/item1.xml><?xml version="1.0" encoding="utf-8"?>
-<?mso-contentType ?>
-<FormTemplates xmlns="http://schemas.microsoft.com/sharepoint/v3/contenttype/forms">
-  <Display>DocumentLibraryForm</Display>
-  <Edit>DocumentLibraryForm</Edit>
-  <New>DocumentLibraryForm</New>
-</FormTemplates>
-</file>
-
-<file path=customXml/item2.xml><?xml version="1.0" encoding="utf-8"?>
 <ct:contentTypeSchema xmlns:ct="http://schemas.microsoft.com/office/2006/metadata/contentType" xmlns:ma="http://schemas.microsoft.com/office/2006/metadata/properties/metaAttributes" ct:_="" ma:_="" ma:contentTypeName="Document" ma:contentTypeID="0x01010079F111ED35F8CC479449609E8A0923A6" ma:contentTypeVersion="30" ma:contentTypeDescription="Create a new document." ma:contentTypeScope="" ma:versionID="cec0622158e8f13124e9e8fd4de31bd1">
   <xsd:schema xmlns:xsd="http://www.w3.org/2001/XMLSchema" xmlns:xs="http://www.w3.org/2001/XMLSchema" xmlns:p="http://schemas.microsoft.com/office/2006/metadata/properties" xmlns:ns1="http://schemas.microsoft.com/sharepoint/v3" xmlns:ns2="71af3243-3dd4-4a8d-8c0d-dd76da1f02a5" xmlns:ns3="16c05727-aa75-4e4a-9b5f-8a80a1165891" xmlns:ns4="230e9df3-be65-4c73-a93b-d1236ebd677e" targetNamespace="http://schemas.microsoft.com/office/2006/metadata/properties" ma:root="true" ma:fieldsID="3b52f30ab005d15df08657af532e6e38" ns1:_="" ns2:_="" ns3:_="" ns4:_="">
     <xsd:import namespace="http://schemas.microsoft.com/sharepoint/v3"/>
@@ -16920,6 +17123,15 @@
 </ct:contentTypeSchema>
 </file>
 
+<file path=customXml/item2.xml><?xml version="1.0" encoding="utf-8"?>
+<?mso-contentType ?>
+<FormTemplates xmlns="http://schemas.microsoft.com/sharepoint/v3/contenttype/forms">
+  <Display>DocumentLibraryForm</Display>
+  <Edit>DocumentLibraryForm</Edit>
+  <New>DocumentLibraryForm</New>
+</FormTemplates>
+</file>
+
 <file path=customXml/item3.xml><?xml version="1.0" encoding="utf-8"?>
 <p:properties xmlns:p="http://schemas.microsoft.com/office/2006/metadata/properties" xmlns:xsi="http://www.w3.org/2001/XMLSchema-instance" xmlns:pc="http://schemas.microsoft.com/office/infopath/2007/PartnerControls">
   <documentManagement>
@@ -16941,14 +17153,6 @@
 </file>
 
 <file path=customXml/itemProps1.xml><?xml version="1.0" encoding="utf-8"?>
-<ds:datastoreItem xmlns:ds="http://schemas.openxmlformats.org/officeDocument/2006/customXml" ds:itemID="{B0009351-EDD4-484E-ACD6-D50CCB137637}">
-  <ds:schemaRefs>
-    <ds:schemaRef ds:uri="http://schemas.microsoft.com/sharepoint/v3/contenttype/forms"/>
-  </ds:schemaRefs>
-</ds:datastoreItem>
-</file>
-
-<file path=customXml/itemProps2.xml><?xml version="1.0" encoding="utf-8"?>
 <ds:datastoreItem xmlns:ds="http://schemas.openxmlformats.org/officeDocument/2006/customXml" ds:itemID="{79897CAE-455D-42C9-A951-0C21BC122543}">
   <ds:schemaRefs>
     <ds:schemaRef ds:uri="http://schemas.microsoft.com/office/2006/metadata/contentType"/>
@@ -16969,6 +17173,14 @@
 </ds:datastoreItem>
 </file>
 
+<file path=customXml/itemProps2.xml><?xml version="1.0" encoding="utf-8"?>
+<ds:datastoreItem xmlns:ds="http://schemas.openxmlformats.org/officeDocument/2006/customXml" ds:itemID="{B0009351-EDD4-484E-ACD6-D50CCB137637}">
+  <ds:schemaRefs>
+    <ds:schemaRef ds:uri="http://schemas.microsoft.com/sharepoint/v3/contenttype/forms"/>
+  </ds:schemaRefs>
+</ds:datastoreItem>
+</file>
+
 <file path=customXml/itemProps3.xml><?xml version="1.0" encoding="utf-8"?>
 <ds:datastoreItem xmlns:ds="http://schemas.openxmlformats.org/officeDocument/2006/customXml" ds:itemID="{C8DB3C62-858A-4A01-AFEF-21E0BB8CE262}">
   <ds:schemaRefs>

--- a/presentation/Project2-Instrumented-Monitored-Service.pptx
+++ b/presentation/Project2-Instrumented-Monitored-Service.pptx
@@ -13928,7 +13928,7 @@
             <p:ph idx="1"/>
             <p:extLst>
               <p:ext uri="{D42A27DB-BD31-4B8C-83A1-F6EECF244321}">
-                <p14:modId xmlns:p14="http://schemas.microsoft.com/office/powerpoint/2010/main" val="2015624927"/>
+                <p14:modId xmlns:p14="http://schemas.microsoft.com/office/powerpoint/2010/main" val="2308591808"/>
               </p:ext>
             </p:extLst>
           </p:nvPr>
@@ -13980,7 +13980,7 @@
                     <a:p>
                       <a:r>
                         <a:rPr lang="en-US" dirty="0"/>
-                        <a:t>Custom Metrics</a:t>
+                        <a:t>Business Metrics</a:t>
                       </a:r>
                     </a:p>
                   </a:txBody>
@@ -15589,10 +15589,10 @@
       </p:sp>
       <p:pic>
         <p:nvPicPr>
-          <p:cNvPr id="5" name="Picture 4">
+          <p:cNvPr id="8" name="Picture 7">
             <a:extLst>
               <a:ext uri="{FF2B5EF4-FFF2-40B4-BE49-F238E27FC236}">
-                <a16:creationId xmlns:a16="http://schemas.microsoft.com/office/drawing/2014/main" id="{D7E6FFCD-0952-9C77-DAB2-77BA85CCD89C}"/>
+                <a16:creationId xmlns:a16="http://schemas.microsoft.com/office/drawing/2014/main" id="{0C7949CE-496C-34A4-1419-CE703C5FB416}"/>
               </a:ext>
             </a:extLst>
           </p:cNvPr>
@@ -15609,8 +15609,8 @@
         </p:blipFill>
         <p:spPr>
           <a:xfrm>
-            <a:off x="8606197" y="2570292"/>
-            <a:ext cx="2817268" cy="1717416"/>
+            <a:off x="581024" y="4762447"/>
+            <a:ext cx="7263494" cy="1638035"/>
           </a:xfrm>
           <a:prstGeom prst="rect">
             <a:avLst/>
@@ -15619,10 +15619,10 @@
       </p:pic>
       <p:pic>
         <p:nvPicPr>
-          <p:cNvPr id="8" name="Picture 7">
+          <p:cNvPr id="6" name="Picture 5">
             <a:extLst>
               <a:ext uri="{FF2B5EF4-FFF2-40B4-BE49-F238E27FC236}">
-                <a16:creationId xmlns:a16="http://schemas.microsoft.com/office/drawing/2014/main" id="{0C7949CE-496C-34A4-1419-CE703C5FB416}"/>
+                <a16:creationId xmlns:a16="http://schemas.microsoft.com/office/drawing/2014/main" id="{3ED474A2-12C1-1BE7-4CF9-A84A5EAF5AA3}"/>
               </a:ext>
             </a:extLst>
           </p:cNvPr>
@@ -15639,8 +15639,38 @@
         </p:blipFill>
         <p:spPr>
           <a:xfrm>
-            <a:off x="1518557" y="4547507"/>
-            <a:ext cx="9154886" cy="2064575"/>
+            <a:off x="8391721" y="2214185"/>
+            <a:ext cx="3219255" cy="2548262"/>
+          </a:xfrm>
+          <a:prstGeom prst="rect">
+            <a:avLst/>
+          </a:prstGeom>
+        </p:spPr>
+      </p:pic>
+      <p:pic>
+        <p:nvPicPr>
+          <p:cNvPr id="9" name="Picture 8">
+            <a:extLst>
+              <a:ext uri="{FF2B5EF4-FFF2-40B4-BE49-F238E27FC236}">
+                <a16:creationId xmlns:a16="http://schemas.microsoft.com/office/drawing/2014/main" id="{6EB2F0E8-5F10-E280-BAA0-94329C894F33}"/>
+              </a:ext>
+            </a:extLst>
+          </p:cNvPr>
+          <p:cNvPicPr>
+            <a:picLocks noChangeAspect="1"/>
+          </p:cNvPicPr>
+          <p:nvPr/>
+        </p:nvPicPr>
+        <p:blipFill>
+          <a:blip r:embed="rId4"/>
+          <a:stretch>
+            <a:fillRect/>
+          </a:stretch>
+        </p:blipFill>
+        <p:spPr>
+          <a:xfrm>
+            <a:off x="8981756" y="5067042"/>
+            <a:ext cx="2295845" cy="1028844"/>
           </a:xfrm>
           <a:prstGeom prst="rect">
             <a:avLst/>
@@ -16806,6 +16836,15 @@
 </file>
 
 <file path=customXml/item1.xml><?xml version="1.0" encoding="utf-8"?>
+<?mso-contentType ?>
+<FormTemplates xmlns="http://schemas.microsoft.com/sharepoint/v3/contenttype/forms">
+  <Display>DocumentLibraryForm</Display>
+  <Edit>DocumentLibraryForm</Edit>
+  <New>DocumentLibraryForm</New>
+</FormTemplates>
+</file>
+
+<file path=customXml/item2.xml><?xml version="1.0" encoding="utf-8"?>
 <ct:contentTypeSchema xmlns:ct="http://schemas.microsoft.com/office/2006/metadata/contentType" xmlns:ma="http://schemas.microsoft.com/office/2006/metadata/properties/metaAttributes" ct:_="" ma:_="" ma:contentTypeName="Document" ma:contentTypeID="0x01010079F111ED35F8CC479449609E8A0923A6" ma:contentTypeVersion="30" ma:contentTypeDescription="Create a new document." ma:contentTypeScope="" ma:versionID="cec0622158e8f13124e9e8fd4de31bd1">
   <xsd:schema xmlns:xsd="http://www.w3.org/2001/XMLSchema" xmlns:xs="http://www.w3.org/2001/XMLSchema" xmlns:p="http://schemas.microsoft.com/office/2006/metadata/properties" xmlns:ns1="http://schemas.microsoft.com/sharepoint/v3" xmlns:ns2="71af3243-3dd4-4a8d-8c0d-dd76da1f02a5" xmlns:ns3="16c05727-aa75-4e4a-9b5f-8a80a1165891" xmlns:ns4="230e9df3-be65-4c73-a93b-d1236ebd677e" targetNamespace="http://schemas.microsoft.com/office/2006/metadata/properties" ma:root="true" ma:fieldsID="3b52f30ab005d15df08657af532e6e38" ns1:_="" ns2:_="" ns3:_="" ns4:_="">
     <xsd:import namespace="http://schemas.microsoft.com/sharepoint/v3"/>
@@ -17123,15 +17162,6 @@
 </ct:contentTypeSchema>
 </file>
 
-<file path=customXml/item2.xml><?xml version="1.0" encoding="utf-8"?>
-<?mso-contentType ?>
-<FormTemplates xmlns="http://schemas.microsoft.com/sharepoint/v3/contenttype/forms">
-  <Display>DocumentLibraryForm</Display>
-  <Edit>DocumentLibraryForm</Edit>
-  <New>DocumentLibraryForm</New>
-</FormTemplates>
-</file>
-
 <file path=customXml/item3.xml><?xml version="1.0" encoding="utf-8"?>
 <p:properties xmlns:p="http://schemas.microsoft.com/office/2006/metadata/properties" xmlns:xsi="http://www.w3.org/2001/XMLSchema-instance" xmlns:pc="http://schemas.microsoft.com/office/infopath/2007/PartnerControls">
   <documentManagement>
@@ -17153,6 +17183,14 @@
 </file>
 
 <file path=customXml/itemProps1.xml><?xml version="1.0" encoding="utf-8"?>
+<ds:datastoreItem xmlns:ds="http://schemas.openxmlformats.org/officeDocument/2006/customXml" ds:itemID="{B0009351-EDD4-484E-ACD6-D50CCB137637}">
+  <ds:schemaRefs>
+    <ds:schemaRef ds:uri="http://schemas.microsoft.com/sharepoint/v3/contenttype/forms"/>
+  </ds:schemaRefs>
+</ds:datastoreItem>
+</file>
+
+<file path=customXml/itemProps2.xml><?xml version="1.0" encoding="utf-8"?>
 <ds:datastoreItem xmlns:ds="http://schemas.openxmlformats.org/officeDocument/2006/customXml" ds:itemID="{79897CAE-455D-42C9-A951-0C21BC122543}">
   <ds:schemaRefs>
     <ds:schemaRef ds:uri="http://schemas.microsoft.com/office/2006/metadata/contentType"/>
@@ -17173,14 +17211,6 @@
 </ds:datastoreItem>
 </file>
 
-<file path=customXml/itemProps2.xml><?xml version="1.0" encoding="utf-8"?>
-<ds:datastoreItem xmlns:ds="http://schemas.openxmlformats.org/officeDocument/2006/customXml" ds:itemID="{B0009351-EDD4-484E-ACD6-D50CCB137637}">
-  <ds:schemaRefs>
-    <ds:schemaRef ds:uri="http://schemas.microsoft.com/sharepoint/v3/contenttype/forms"/>
-  </ds:schemaRefs>
-</ds:datastoreItem>
-</file>
-
 <file path=customXml/itemProps3.xml><?xml version="1.0" encoding="utf-8"?>
 <ds:datastoreItem xmlns:ds="http://schemas.openxmlformats.org/officeDocument/2006/customXml" ds:itemID="{C8DB3C62-858A-4A01-AFEF-21E0BB8CE262}">
   <ds:schemaRefs>
